--- a/Prezentace/Maturita/2025/2 programovací jazyk.pptx
+++ b/Prezentace/Maturita/2025/2 programovací jazyk.pptx
@@ -1075,6 +1075,13 @@
         </dgm:presLayoutVars>
       </dgm:prSet>
       <dgm:spPr/>
+      <dgm:t>
+        <a:bodyPr/>
+        <a:lstStyle/>
+        <a:p>
+          <a:endParaRPr lang="cs-CZ"/>
+        </a:p>
+      </dgm:t>
     </dgm:pt>
     <dgm:pt modelId="{AC92C661-4CAC-4803-BC89-0CAC07829001}" type="pres">
       <dgm:prSet presAssocID="{E9738889-9736-4411-ADC1-890D3FF06590}" presName="node" presStyleLbl="node1" presStyleIdx="0" presStyleCnt="4">
@@ -1083,6 +1090,13 @@
         </dgm:presLayoutVars>
       </dgm:prSet>
       <dgm:spPr/>
+      <dgm:t>
+        <a:bodyPr/>
+        <a:lstStyle/>
+        <a:p>
+          <a:endParaRPr lang="cs-CZ"/>
+        </a:p>
+      </dgm:t>
     </dgm:pt>
     <dgm:pt modelId="{F66966F9-710E-421F-9620-91540C9A72CD}" type="pres">
       <dgm:prSet presAssocID="{AFE7161A-1864-40C0-B362-CA1E6F57E468}" presName="sibTrans" presStyleCnt="0"/>
@@ -1095,6 +1109,13 @@
         </dgm:presLayoutVars>
       </dgm:prSet>
       <dgm:spPr/>
+      <dgm:t>
+        <a:bodyPr/>
+        <a:lstStyle/>
+        <a:p>
+          <a:endParaRPr lang="cs-CZ"/>
+        </a:p>
+      </dgm:t>
     </dgm:pt>
     <dgm:pt modelId="{78A23EF4-77AF-442F-8944-92A60F910F6F}" type="pres">
       <dgm:prSet presAssocID="{C5B4403C-8A41-4843-9D25-5E9AD2C5CBDA}" presName="sibTrans" presStyleCnt="0"/>
@@ -1107,6 +1128,13 @@
         </dgm:presLayoutVars>
       </dgm:prSet>
       <dgm:spPr/>
+      <dgm:t>
+        <a:bodyPr/>
+        <a:lstStyle/>
+        <a:p>
+          <a:endParaRPr lang="cs-CZ"/>
+        </a:p>
+      </dgm:t>
     </dgm:pt>
     <dgm:pt modelId="{AD7D911E-9F8C-4245-B521-B5B38E7C3813}" type="pres">
       <dgm:prSet presAssocID="{A70056A2-FEF8-4A8E-B30A-BB44BD4AE2B1}" presName="sibTrans" presStyleCnt="0"/>
@@ -1119,18 +1147,25 @@
         </dgm:presLayoutVars>
       </dgm:prSet>
       <dgm:spPr/>
+      <dgm:t>
+        <a:bodyPr/>
+        <a:lstStyle/>
+        <a:p>
+          <a:endParaRPr lang="cs-CZ"/>
+        </a:p>
+      </dgm:t>
     </dgm:pt>
   </dgm:ptLst>
   <dgm:cxnLst>
-    <dgm:cxn modelId="{928A4E0F-2301-4F15-AC01-8D024A5BCB29}" srcId="{F69A6973-18E4-42AD-A0D6-C8D04CBE8D02}" destId="{E9738889-9736-4411-ADC1-890D3FF06590}" srcOrd="0" destOrd="0" parTransId="{D8CC59A6-9CED-4235-930A-AB32328A738C}" sibTransId="{AFE7161A-1864-40C0-B362-CA1E6F57E468}"/>
-    <dgm:cxn modelId="{5A148C79-C319-4574-A3A2-BFB97B55A824}" type="presOf" srcId="{BE66DD38-4824-42A9-93C5-054ABF5C556C}" destId="{0A9EB3B9-9292-4B1E-B962-787BF7C98BC5}" srcOrd="0" destOrd="0" presId="urn:microsoft.com/office/officeart/2005/8/layout/default"/>
+    <dgm:cxn modelId="{A821D1C3-61F4-4DC9-A47B-73ABBAB8072C}" srcId="{F69A6973-18E4-42AD-A0D6-C8D04CBE8D02}" destId="{BE66DD38-4824-42A9-93C5-054ABF5C556C}" srcOrd="1" destOrd="0" parTransId="{B2275484-11AA-4944-99D5-B4419F0B029D}" sibTransId="{C5B4403C-8A41-4843-9D25-5E9AD2C5CBDA}"/>
+    <dgm:cxn modelId="{E845B8B6-9AA0-4406-ACE0-E1BABC33CBAF}" srcId="{F69A6973-18E4-42AD-A0D6-C8D04CBE8D02}" destId="{EDF56FC3-0D91-477C-929F-B71E73624121}" srcOrd="3" destOrd="0" parTransId="{28775C8C-6136-4905-89D3-7621438B17C8}" sibTransId="{499605AD-D3D0-4213-9A00-7C1D1403151F}"/>
+    <dgm:cxn modelId="{761AF7C9-10DB-4C83-A634-A6DC90114468}" type="presOf" srcId="{F69A6973-18E4-42AD-A0D6-C8D04CBE8D02}" destId="{FAB4A827-3499-41FD-9121-88B4C1C4944E}" srcOrd="0" destOrd="0" presId="urn:microsoft.com/office/officeart/2005/8/layout/default"/>
+    <dgm:cxn modelId="{340902C9-1323-4972-A673-6717BD0A11F5}" srcId="{F69A6973-18E4-42AD-A0D6-C8D04CBE8D02}" destId="{108C6BAC-A31A-49D8-8EB9-8AD25A982C9E}" srcOrd="2" destOrd="0" parTransId="{E1A65DD0-489E-453D-9B8D-AE7CBB5523F9}" sibTransId="{A70056A2-FEF8-4A8E-B30A-BB44BD4AE2B1}"/>
+    <dgm:cxn modelId="{08AEEBB6-6977-40D8-A6D6-BC7C4C917587}" type="presOf" srcId="{108C6BAC-A31A-49D8-8EB9-8AD25A982C9E}" destId="{1BD3DFF4-61D6-4E87-A966-205F76D6B7E8}" srcOrd="0" destOrd="0" presId="urn:microsoft.com/office/officeart/2005/8/layout/default"/>
     <dgm:cxn modelId="{6323A081-3900-4312-8B10-A45D80200C8F}" type="presOf" srcId="{E9738889-9736-4411-ADC1-890D3FF06590}" destId="{AC92C661-4CAC-4803-BC89-0CAC07829001}" srcOrd="0" destOrd="0" presId="urn:microsoft.com/office/officeart/2005/8/layout/default"/>
     <dgm:cxn modelId="{6C446895-B56E-4F2F-8958-B1DB643D062B}" type="presOf" srcId="{EDF56FC3-0D91-477C-929F-B71E73624121}" destId="{B366D64F-563E-4ACC-9AA2-47ECC5A630BD}" srcOrd="0" destOrd="0" presId="urn:microsoft.com/office/officeart/2005/8/layout/default"/>
-    <dgm:cxn modelId="{E845B8B6-9AA0-4406-ACE0-E1BABC33CBAF}" srcId="{F69A6973-18E4-42AD-A0D6-C8D04CBE8D02}" destId="{EDF56FC3-0D91-477C-929F-B71E73624121}" srcOrd="3" destOrd="0" parTransId="{28775C8C-6136-4905-89D3-7621438B17C8}" sibTransId="{499605AD-D3D0-4213-9A00-7C1D1403151F}"/>
-    <dgm:cxn modelId="{08AEEBB6-6977-40D8-A6D6-BC7C4C917587}" type="presOf" srcId="{108C6BAC-A31A-49D8-8EB9-8AD25A982C9E}" destId="{1BD3DFF4-61D6-4E87-A966-205F76D6B7E8}" srcOrd="0" destOrd="0" presId="urn:microsoft.com/office/officeart/2005/8/layout/default"/>
-    <dgm:cxn modelId="{A821D1C3-61F4-4DC9-A47B-73ABBAB8072C}" srcId="{F69A6973-18E4-42AD-A0D6-C8D04CBE8D02}" destId="{BE66DD38-4824-42A9-93C5-054ABF5C556C}" srcOrd="1" destOrd="0" parTransId="{B2275484-11AA-4944-99D5-B4419F0B029D}" sibTransId="{C5B4403C-8A41-4843-9D25-5E9AD2C5CBDA}"/>
-    <dgm:cxn modelId="{340902C9-1323-4972-A673-6717BD0A11F5}" srcId="{F69A6973-18E4-42AD-A0D6-C8D04CBE8D02}" destId="{108C6BAC-A31A-49D8-8EB9-8AD25A982C9E}" srcOrd="2" destOrd="0" parTransId="{E1A65DD0-489E-453D-9B8D-AE7CBB5523F9}" sibTransId="{A70056A2-FEF8-4A8E-B30A-BB44BD4AE2B1}"/>
-    <dgm:cxn modelId="{761AF7C9-10DB-4C83-A634-A6DC90114468}" type="presOf" srcId="{F69A6973-18E4-42AD-A0D6-C8D04CBE8D02}" destId="{FAB4A827-3499-41FD-9121-88B4C1C4944E}" srcOrd="0" destOrd="0" presId="urn:microsoft.com/office/officeart/2005/8/layout/default"/>
+    <dgm:cxn modelId="{5A148C79-C319-4574-A3A2-BFB97B55A824}" type="presOf" srcId="{BE66DD38-4824-42A9-93C5-054ABF5C556C}" destId="{0A9EB3B9-9292-4B1E-B962-787BF7C98BC5}" srcOrd="0" destOrd="0" presId="urn:microsoft.com/office/officeart/2005/8/layout/default"/>
+    <dgm:cxn modelId="{928A4E0F-2301-4F15-AC01-8D024A5BCB29}" srcId="{F69A6973-18E4-42AD-A0D6-C8D04CBE8D02}" destId="{E9738889-9736-4411-ADC1-890D3FF06590}" srcOrd="0" destOrd="0" parTransId="{D8CC59A6-9CED-4235-930A-AB32328A738C}" sibTransId="{AFE7161A-1864-40C0-B362-CA1E6F57E468}"/>
     <dgm:cxn modelId="{9134919D-9204-4757-A332-3DC166978BBF}" type="presParOf" srcId="{FAB4A827-3499-41FD-9121-88B4C1C4944E}" destId="{AC92C661-4CAC-4803-BC89-0CAC07829001}" srcOrd="0" destOrd="0" presId="urn:microsoft.com/office/officeart/2005/8/layout/default"/>
     <dgm:cxn modelId="{E503E6FB-2C63-46FB-A69C-042FBD24C4EF}" type="presParOf" srcId="{FAB4A827-3499-41FD-9121-88B4C1C4944E}" destId="{F66966F9-710E-421F-9620-91540C9A72CD}" srcOrd="1" destOrd="0" presId="urn:microsoft.com/office/officeart/2005/8/layout/default"/>
     <dgm:cxn modelId="{CF02ACDB-BFE8-44A2-8D48-EDE9C8286F0B}" type="presParOf" srcId="{FAB4A827-3499-41FD-9121-88B4C1C4944E}" destId="{0A9EB3B9-9292-4B1E-B962-787BF7C98BC5}" srcOrd="2" destOrd="0" presId="urn:microsoft.com/office/officeart/2005/8/layout/default"/>
@@ -1211,7 +1246,7 @@
         </a:bodyPr>
         <a:lstStyle/>
         <a:p>
-          <a:pPr marL="0" lvl="0" indent="0" algn="ctr" defTabSz="1333500">
+          <a:pPr lvl="0" algn="ctr" defTabSz="1333500">
             <a:lnSpc>
               <a:spcPct val="90000"/>
             </a:lnSpc>
@@ -1221,7 +1256,6 @@
             <a:spcAft>
               <a:spcPct val="35000"/>
             </a:spcAft>
-            <a:buNone/>
           </a:pPr>
           <a:r>
             <a:rPr lang="cs-CZ" sz="3000" kern="1200" dirty="0"/>
@@ -1289,7 +1323,7 @@
         </a:bodyPr>
         <a:lstStyle/>
         <a:p>
-          <a:pPr marL="0" lvl="0" indent="0" algn="ctr" defTabSz="1333500">
+          <a:pPr lvl="0" algn="ctr" defTabSz="1333500">
             <a:lnSpc>
               <a:spcPct val="90000"/>
             </a:lnSpc>
@@ -1299,7 +1333,6 @@
             <a:spcAft>
               <a:spcPct val="35000"/>
             </a:spcAft>
-            <a:buNone/>
           </a:pPr>
           <a:r>
             <a:rPr lang="cs-CZ" sz="3000" kern="1200" dirty="0"/>
@@ -1367,7 +1400,7 @@
         </a:bodyPr>
         <a:lstStyle/>
         <a:p>
-          <a:pPr marL="0" lvl="0" indent="0" algn="ctr" defTabSz="1333500">
+          <a:pPr lvl="0" algn="ctr" defTabSz="1333500">
             <a:lnSpc>
               <a:spcPct val="90000"/>
             </a:lnSpc>
@@ -1377,7 +1410,6 @@
             <a:spcAft>
               <a:spcPct val="35000"/>
             </a:spcAft>
-            <a:buNone/>
           </a:pPr>
           <a:r>
             <a:rPr lang="cs-CZ" sz="3000" kern="1200" dirty="0"/>
@@ -1445,7 +1477,7 @@
         </a:bodyPr>
         <a:lstStyle/>
         <a:p>
-          <a:pPr marL="0" lvl="0" indent="0" algn="ctr" defTabSz="1333500">
+          <a:pPr lvl="0" algn="ctr" defTabSz="1333500">
             <a:lnSpc>
               <a:spcPct val="90000"/>
             </a:lnSpc>
@@ -1455,7 +1487,6 @@
             <a:spcAft>
               <a:spcPct val="35000"/>
             </a:spcAft>
-            <a:buNone/>
           </a:pPr>
           <a:r>
             <a:rPr lang="cs-CZ" sz="3000" kern="1200" dirty="0"/>
@@ -2736,7 +2767,7 @@
           <a:p>
             <a:fld id="{0F4CBD7E-8EC4-40D0-831C-FC6BF586B823}" type="datetimeFigureOut">
               <a:rPr lang="cs-CZ" smtClean="0"/>
-              <a:t>02.12.2024</a:t>
+              <a:t>04.12.2025</a:t>
             </a:fld>
             <a:endParaRPr lang="cs-CZ"/>
           </a:p>
@@ -4001,7 +4032,7 @@
           <a:p>
             <a:fld id="{CCDA23A1-6BD0-48D8-A1FE-BC95074C88FA}" type="datetimeFigureOut">
               <a:rPr lang="cs-CZ" smtClean="0"/>
-              <a:t>02.12.2024</a:t>
+              <a:t>04.12.2025</a:t>
             </a:fld>
             <a:endParaRPr lang="cs-CZ"/>
           </a:p>
@@ -4252,7 +4283,7 @@
           <a:p>
             <a:fld id="{CCDA23A1-6BD0-48D8-A1FE-BC95074C88FA}" type="datetimeFigureOut">
               <a:rPr lang="cs-CZ" smtClean="0"/>
-              <a:t>02.12.2024</a:t>
+              <a:t>04.12.2025</a:t>
             </a:fld>
             <a:endParaRPr lang="cs-CZ"/>
           </a:p>
@@ -4566,7 +4597,7 @@
           <a:p>
             <a:fld id="{CCDA23A1-6BD0-48D8-A1FE-BC95074C88FA}" type="datetimeFigureOut">
               <a:rPr lang="cs-CZ" smtClean="0"/>
-              <a:t>02.12.2024</a:t>
+              <a:t>04.12.2025</a:t>
             </a:fld>
             <a:endParaRPr lang="cs-CZ"/>
           </a:p>
@@ -4907,7 +4938,7 @@
           <a:p>
             <a:fld id="{CCDA23A1-6BD0-48D8-A1FE-BC95074C88FA}" type="datetimeFigureOut">
               <a:rPr lang="cs-CZ" smtClean="0"/>
-              <a:t>02.12.2024</a:t>
+              <a:t>04.12.2025</a:t>
             </a:fld>
             <a:endParaRPr lang="cs-CZ"/>
           </a:p>
@@ -5221,7 +5252,7 @@
           <a:p>
             <a:fld id="{CCDA23A1-6BD0-48D8-A1FE-BC95074C88FA}" type="datetimeFigureOut">
               <a:rPr lang="cs-CZ" smtClean="0"/>
-              <a:t>02.12.2024</a:t>
+              <a:t>04.12.2025</a:t>
             </a:fld>
             <a:endParaRPr lang="cs-CZ"/>
           </a:p>
@@ -5614,7 +5645,7 @@
           <a:p>
             <a:fld id="{CCDA23A1-6BD0-48D8-A1FE-BC95074C88FA}" type="datetimeFigureOut">
               <a:rPr lang="cs-CZ" smtClean="0"/>
-              <a:t>02.12.2024</a:t>
+              <a:t>04.12.2025</a:t>
             </a:fld>
             <a:endParaRPr lang="cs-CZ"/>
           </a:p>
@@ -5784,7 +5815,7 @@
           <a:p>
             <a:fld id="{CCDA23A1-6BD0-48D8-A1FE-BC95074C88FA}" type="datetimeFigureOut">
               <a:rPr lang="cs-CZ" smtClean="0"/>
-              <a:t>02.12.2024</a:t>
+              <a:t>04.12.2025</a:t>
             </a:fld>
             <a:endParaRPr lang="cs-CZ"/>
           </a:p>
@@ -5964,7 +5995,7 @@
           <a:p>
             <a:fld id="{CCDA23A1-6BD0-48D8-A1FE-BC95074C88FA}" type="datetimeFigureOut">
               <a:rPr lang="cs-CZ" smtClean="0"/>
-              <a:t>02.12.2024</a:t>
+              <a:t>04.12.2025</a:t>
             </a:fld>
             <a:endParaRPr lang="cs-CZ"/>
           </a:p>
@@ -6140,7 +6171,7 @@
           <a:p>
             <a:fld id="{CCDA23A1-6BD0-48D8-A1FE-BC95074C88FA}" type="datetimeFigureOut">
               <a:rPr lang="cs-CZ" smtClean="0"/>
-              <a:t>02.12.2024</a:t>
+              <a:t>04.12.2025</a:t>
             </a:fld>
             <a:endParaRPr lang="cs-CZ"/>
           </a:p>
@@ -6387,7 +6418,7 @@
           <a:p>
             <a:fld id="{CCDA23A1-6BD0-48D8-A1FE-BC95074C88FA}" type="datetimeFigureOut">
               <a:rPr lang="cs-CZ" smtClean="0"/>
-              <a:t>02.12.2024</a:t>
+              <a:t>04.12.2025</a:t>
             </a:fld>
             <a:endParaRPr lang="cs-CZ"/>
           </a:p>
@@ -6619,7 +6650,7 @@
           <a:p>
             <a:fld id="{CCDA23A1-6BD0-48D8-A1FE-BC95074C88FA}" type="datetimeFigureOut">
               <a:rPr lang="cs-CZ" smtClean="0"/>
-              <a:t>02.12.2024</a:t>
+              <a:t>04.12.2025</a:t>
             </a:fld>
             <a:endParaRPr lang="cs-CZ"/>
           </a:p>
@@ -6993,7 +7024,7 @@
           <a:p>
             <a:fld id="{CCDA23A1-6BD0-48D8-A1FE-BC95074C88FA}" type="datetimeFigureOut">
               <a:rPr lang="cs-CZ" smtClean="0"/>
-              <a:t>02.12.2024</a:t>
+              <a:t>04.12.2025</a:t>
             </a:fld>
             <a:endParaRPr lang="cs-CZ"/>
           </a:p>
@@ -7116,7 +7147,7 @@
           <a:p>
             <a:fld id="{CCDA23A1-6BD0-48D8-A1FE-BC95074C88FA}" type="datetimeFigureOut">
               <a:rPr lang="cs-CZ" smtClean="0"/>
-              <a:t>02.12.2024</a:t>
+              <a:t>04.12.2025</a:t>
             </a:fld>
             <a:endParaRPr lang="cs-CZ"/>
           </a:p>
@@ -7211,7 +7242,7 @@
           <a:p>
             <a:fld id="{CCDA23A1-6BD0-48D8-A1FE-BC95074C88FA}" type="datetimeFigureOut">
               <a:rPr lang="cs-CZ" smtClean="0"/>
-              <a:t>02.12.2024</a:t>
+              <a:t>04.12.2025</a:t>
             </a:fld>
             <a:endParaRPr lang="cs-CZ"/>
           </a:p>
@@ -7466,7 +7497,7 @@
           <a:p>
             <a:fld id="{CCDA23A1-6BD0-48D8-A1FE-BC95074C88FA}" type="datetimeFigureOut">
               <a:rPr lang="cs-CZ" smtClean="0"/>
-              <a:t>02.12.2024</a:t>
+              <a:t>04.12.2025</a:t>
             </a:fld>
             <a:endParaRPr lang="cs-CZ"/>
           </a:p>
@@ -7729,7 +7760,7 @@
           <a:p>
             <a:fld id="{CCDA23A1-6BD0-48D8-A1FE-BC95074C88FA}" type="datetimeFigureOut">
               <a:rPr lang="cs-CZ" smtClean="0"/>
-              <a:t>02.12.2024</a:t>
+              <a:t>04.12.2025</a:t>
             </a:fld>
             <a:endParaRPr lang="cs-CZ"/>
           </a:p>
@@ -8472,7 +8503,7 @@
           <a:p>
             <a:fld id="{CCDA23A1-6BD0-48D8-A1FE-BC95074C88FA}" type="datetimeFigureOut">
               <a:rPr lang="cs-CZ" smtClean="0"/>
-              <a:t>02.12.2024</a:t>
+              <a:t>04.12.2025</a:t>
             </a:fld>
             <a:endParaRPr lang="cs-CZ"/>
           </a:p>
@@ -9155,7 +9186,7 @@
                 <a16:creationId xmlns:a16="http://schemas.microsoft.com/office/drawing/2014/main" id="{A57C1A16-B8AB-4D99-A195-A38F556A6486}"/>
               </a:ext>
               <a:ext uri="{C183D7F6-B498-43B3-948B-1728B52AA6E4}">
-                <adec:decorative xmlns:adec="http://schemas.microsoft.com/office/drawing/2017/decorative" val="1"/>
+                <adec:decorative xmlns:adec="http://schemas.microsoft.com/office/drawing/2017/decorative" xmlns="" val="1"/>
               </a:ext>
             </a:extLst>
           </p:cNvPr>
@@ -9209,7 +9240,7 @@
                 <a16:creationId xmlns:a16="http://schemas.microsoft.com/office/drawing/2014/main" id="{F8A9B20B-D1DD-4573-B5EC-558029519236}"/>
               </a:ext>
               <a:ext uri="{C183D7F6-B498-43B3-948B-1728B52AA6E4}">
-                <adec:decorative xmlns:adec="http://schemas.microsoft.com/office/drawing/2017/decorative" val="1"/>
+                <adec:decorative xmlns:adec="http://schemas.microsoft.com/office/drawing/2017/decorative" xmlns="" val="1"/>
               </a:ext>
             </a:extLst>
           </p:cNvPr>
@@ -9263,7 +9294,7 @@
                 <a16:creationId xmlns:a16="http://schemas.microsoft.com/office/drawing/2014/main" id="{66D61E08-70C3-48D8-BEA0-787111DC30DA}"/>
               </a:ext>
               <a:ext uri="{C183D7F6-B498-43B3-948B-1728B52AA6E4}">
-                <adec:decorative xmlns:adec="http://schemas.microsoft.com/office/drawing/2017/decorative" val="1"/>
+                <adec:decorative xmlns:adec="http://schemas.microsoft.com/office/drawing/2017/decorative" xmlns="" val="1"/>
               </a:ext>
             </a:extLst>
           </p:cNvPr>
@@ -9350,7 +9381,7 @@
                 <a16:creationId xmlns:a16="http://schemas.microsoft.com/office/drawing/2014/main" id="{FC55298F-0AE5-478E-AD2B-03C2614C5833}"/>
               </a:ext>
               <a:ext uri="{C183D7F6-B498-43B3-948B-1728B52AA6E4}">
-                <adec:decorative xmlns:adec="http://schemas.microsoft.com/office/drawing/2017/decorative" val="1"/>
+                <adec:decorative xmlns:adec="http://schemas.microsoft.com/office/drawing/2017/decorative" xmlns="" val="1"/>
               </a:ext>
             </a:extLst>
           </p:cNvPr>
@@ -9437,7 +9468,7 @@
                 <a16:creationId xmlns:a16="http://schemas.microsoft.com/office/drawing/2014/main" id="{C180E4EA-0B63-4779-A895-7E90E71088F3}"/>
               </a:ext>
               <a:ext uri="{C183D7F6-B498-43B3-948B-1728B52AA6E4}">
-                <adec:decorative xmlns:adec="http://schemas.microsoft.com/office/drawing/2017/decorative" val="1"/>
+                <adec:decorative xmlns:adec="http://schemas.microsoft.com/office/drawing/2017/decorative" xmlns="" val="1"/>
               </a:ext>
             </a:extLst>
           </p:cNvPr>
@@ -9502,7 +9533,7 @@
                 <a16:creationId xmlns:a16="http://schemas.microsoft.com/office/drawing/2014/main" id="{CEE01D9D-3DE8-4EED-B0D3-8F3C79CC7673}"/>
               </a:ext>
               <a:ext uri="{C183D7F6-B498-43B3-948B-1728B52AA6E4}">
-                <adec:decorative xmlns:adec="http://schemas.microsoft.com/office/drawing/2017/decorative" val="1"/>
+                <adec:decorative xmlns:adec="http://schemas.microsoft.com/office/drawing/2017/decorative" xmlns="" val="1"/>
               </a:ext>
             </a:extLst>
           </p:cNvPr>
@@ -9590,7 +9621,7 @@
                 <a16:creationId xmlns:a16="http://schemas.microsoft.com/office/drawing/2014/main" id="{89AF5CE9-607F-43F4-8983-DCD6DA4051FD}"/>
               </a:ext>
               <a:ext uri="{C183D7F6-B498-43B3-948B-1728B52AA6E4}">
-                <adec:decorative xmlns:adec="http://schemas.microsoft.com/office/drawing/2017/decorative" val="1"/>
+                <adec:decorative xmlns:adec="http://schemas.microsoft.com/office/drawing/2017/decorative" xmlns="" val="1"/>
               </a:ext>
             </a:extLst>
           </p:cNvPr>
@@ -9679,7 +9710,7 @@
                 <a16:creationId xmlns:a16="http://schemas.microsoft.com/office/drawing/2014/main" id="{6EEA2DBD-9E1E-4521-8C01-F32AD18A89E3}"/>
               </a:ext>
               <a:ext uri="{C183D7F6-B498-43B3-948B-1728B52AA6E4}">
-                <adec:decorative xmlns:adec="http://schemas.microsoft.com/office/drawing/2017/decorative" val="1"/>
+                <adec:decorative xmlns:adec="http://schemas.microsoft.com/office/drawing/2017/decorative" xmlns="" val="1"/>
               </a:ext>
             </a:extLst>
           </p:cNvPr>
@@ -9766,7 +9797,7 @@
                 <a16:creationId xmlns:a16="http://schemas.microsoft.com/office/drawing/2014/main" id="{15BBD2C1-BA9B-46A9-A27A-33498B169272}"/>
               </a:ext>
               <a:ext uri="{C183D7F6-B498-43B3-948B-1728B52AA6E4}">
-                <adec:decorative xmlns:adec="http://schemas.microsoft.com/office/drawing/2017/decorative" val="1"/>
+                <adec:decorative xmlns:adec="http://schemas.microsoft.com/office/drawing/2017/decorative" xmlns="" val="1"/>
               </a:ext>
             </a:extLst>
           </p:cNvPr>
@@ -10650,15 +10681,19 @@
             </a:r>
             <a:r>
               <a:rPr lang="cs-CZ" dirty="0"/>
-              <a:t> – </a:t>
-            </a:r>
-            <a:r>
-              <a:rPr lang="cs-CZ" dirty="0" err="1"/>
-              <a:t>lamba</a:t>
+              <a:t> </a:t>
+            </a:r>
+            <a:r>
+              <a:rPr lang="cs-CZ"/>
+              <a:t>– </a:t>
+            </a:r>
+            <a:r>
+              <a:rPr lang="cs-CZ" smtClean="0"/>
+              <a:t>lambda </a:t>
             </a:r>
             <a:r>
               <a:rPr lang="cs-CZ" dirty="0"/>
-              <a:t> kalkul (</a:t>
+              <a:t>kalkul (</a:t>
             </a:r>
             <a:r>
               <a:rPr lang="cs-CZ" dirty="0" err="1"/>
